--- a/topic09-menus-and-persistence/unit-1/talk-3-menu/c-menu.pptx
+++ b/topic09-menus-and-persistence/unit-1/talk-3-menu/c-menu.pptx
@@ -5,7 +5,7 @@
     <p:sldMasterId id="2147483660" r:id="rId1"/>
   </p:sldMasterIdLst>
   <p:notesMasterIdLst>
-    <p:notesMasterId r:id="rId16"/>
+    <p:notesMasterId r:id="rId17"/>
   </p:notesMasterIdLst>
   <p:sldIdLst>
     <p:sldId id="383" r:id="rId2"/>
@@ -14,14 +14,15 @@
     <p:sldId id="343" r:id="rId5"/>
     <p:sldId id="345" r:id="rId6"/>
     <p:sldId id="457" r:id="rId7"/>
-    <p:sldId id="455" r:id="rId8"/>
-    <p:sldId id="350" r:id="rId9"/>
-    <p:sldId id="406" r:id="rId10"/>
-    <p:sldId id="456" r:id="rId11"/>
-    <p:sldId id="407" r:id="rId12"/>
-    <p:sldId id="408" r:id="rId13"/>
-    <p:sldId id="342" r:id="rId14"/>
-    <p:sldId id="347" r:id="rId15"/>
+    <p:sldId id="459" r:id="rId8"/>
+    <p:sldId id="455" r:id="rId9"/>
+    <p:sldId id="350" r:id="rId10"/>
+    <p:sldId id="460" r:id="rId11"/>
+    <p:sldId id="406" r:id="rId12"/>
+    <p:sldId id="407" r:id="rId13"/>
+    <p:sldId id="408" r:id="rId14"/>
+    <p:sldId id="342" r:id="rId15"/>
+    <p:sldId id="347" r:id="rId16"/>
   </p:sldIdLst>
   <p:sldSz cx="12192000" cy="6858000"/>
   <p:notesSz cx="6858000" cy="9144000"/>
@@ -221,7 +222,7 @@
           <a:p>
             <a:fld id="{56BC3C30-7F3D-4B20-9974-47C57B22CA6E}" type="datetimeFigureOut">
               <a:rPr lang="en-IE" smtClean="0"/>
-              <a:t>11/11/2025</a:t>
+              <a:t>12/11/2025</a:t>
             </a:fld>
             <a:endParaRPr lang="en-IE"/>
           </a:p>
@@ -1241,7 +1242,7 @@
             <a:fld id="{1D8BD707-D9CF-40AE-B4C6-C98DA3205C09}" type="datetimeFigureOut">
               <a:rPr lang="en-US" smtClean="0"/>
               <a:pPr/>
-              <a:t>11/11/25</a:t>
+              <a:t>11/12/25</a:t>
             </a:fld>
             <a:endParaRPr lang="en-US"/>
           </a:p>
@@ -1413,7 +1414,7 @@
             <a:fld id="{1D8BD707-D9CF-40AE-B4C6-C98DA3205C09}" type="datetimeFigureOut">
               <a:rPr lang="en-US" smtClean="0"/>
               <a:pPr/>
-              <a:t>11/11/25</a:t>
+              <a:t>11/12/25</a:t>
             </a:fld>
             <a:endParaRPr lang="en-US"/>
           </a:p>
@@ -1595,7 +1596,7 @@
             <a:fld id="{1D8BD707-D9CF-40AE-B4C6-C98DA3205C09}" type="datetimeFigureOut">
               <a:rPr lang="en-US" smtClean="0"/>
               <a:pPr/>
-              <a:t>11/11/25</a:t>
+              <a:t>11/12/25</a:t>
             </a:fld>
             <a:endParaRPr lang="en-US"/>
           </a:p>
@@ -2234,7 +2235,7 @@
             <a:fld id="{1D8BD707-D9CF-40AE-B4C6-C98DA3205C09}" type="datetimeFigureOut">
               <a:rPr lang="en-US" smtClean="0"/>
               <a:pPr/>
-              <a:t>11/11/25</a:t>
+              <a:t>11/12/25</a:t>
             </a:fld>
             <a:endParaRPr lang="en-US"/>
           </a:p>
@@ -2828,7 +2829,7 @@
             <a:fld id="{1D8BD707-D9CF-40AE-B4C6-C98DA3205C09}" type="datetimeFigureOut">
               <a:rPr lang="en-US" smtClean="0"/>
               <a:pPr/>
-              <a:t>11/11/25</a:t>
+              <a:t>11/12/25</a:t>
             </a:fld>
             <a:endParaRPr lang="en-US"/>
           </a:p>
@@ -3129,7 +3130,7 @@
             <a:fld id="{1D8BD707-D9CF-40AE-B4C6-C98DA3205C09}" type="datetimeFigureOut">
               <a:rPr lang="en-US" smtClean="0"/>
               <a:pPr/>
-              <a:t>11/11/25</a:t>
+              <a:t>11/12/25</a:t>
             </a:fld>
             <a:endParaRPr lang="en-US"/>
           </a:p>
@@ -3882,7 +3883,7 @@
             <a:fld id="{1D8BD707-D9CF-40AE-B4C6-C98DA3205C09}" type="datetimeFigureOut">
               <a:rPr lang="en-US" smtClean="0"/>
               <a:pPr/>
-              <a:t>11/11/25</a:t>
+              <a:t>11/12/25</a:t>
             </a:fld>
             <a:endParaRPr lang="en-US"/>
           </a:p>
@@ -4294,7 +4295,7 @@
             <a:fld id="{1D8BD707-D9CF-40AE-B4C6-C98DA3205C09}" type="datetimeFigureOut">
               <a:rPr lang="en-US" smtClean="0"/>
               <a:pPr/>
-              <a:t>11/11/25</a:t>
+              <a:t>11/12/25</a:t>
             </a:fld>
             <a:endParaRPr lang="en-US"/>
           </a:p>
@@ -4713,7 +4714,7 @@
             <a:fld id="{1D8BD707-D9CF-40AE-B4C6-C98DA3205C09}" type="datetimeFigureOut">
               <a:rPr lang="en-US" smtClean="0"/>
               <a:pPr/>
-              <a:t>11/11/25</a:t>
+              <a:t>11/12/25</a:t>
             </a:fld>
             <a:endParaRPr lang="en-US"/>
           </a:p>
@@ -4992,7 +4993,7 @@
             <a:fld id="{1D8BD707-D9CF-40AE-B4C6-C98DA3205C09}" type="datetimeFigureOut">
               <a:rPr lang="en-US" smtClean="0"/>
               <a:pPr/>
-              <a:t>11/11/25</a:t>
+              <a:t>11/12/25</a:t>
             </a:fld>
             <a:endParaRPr lang="en-US"/>
           </a:p>
@@ -5251,7 +5252,7 @@
             <a:fld id="{1D8BD707-D9CF-40AE-B4C6-C98DA3205C09}" type="datetimeFigureOut">
               <a:rPr lang="en-US" smtClean="0"/>
               <a:pPr/>
-              <a:t>11/11/25</a:t>
+              <a:t>11/12/25</a:t>
             </a:fld>
             <a:endParaRPr lang="en-US"/>
           </a:p>
@@ -5471,7 +5472,7 @@
             <a:fld id="{1D8BD707-D9CF-40AE-B4C6-C98DA3205C09}" type="datetimeFigureOut">
               <a:rPr lang="en-US" smtClean="0"/>
               <a:pPr/>
-              <a:t>11/11/25</a:t>
+              <a:t>11/12/25</a:t>
             </a:fld>
             <a:endParaRPr lang="en-US"/>
           </a:p>
@@ -6297,7 +6298,7 @@
           <p:cNvPr id="2" name="Title 1">
             <a:extLst>
               <a:ext uri="{FF2B5EF4-FFF2-40B4-BE49-F238E27FC236}">
-                <a16:creationId xmlns:a16="http://schemas.microsoft.com/office/drawing/2014/main" id="{B224850E-FD0D-4AE2-A26F-3F544CDC8E33}"/>
+                <a16:creationId xmlns:a16="http://schemas.microsoft.com/office/drawing/2014/main" id="{71AA42DC-EEEB-F2F3-8D52-6676E3E41969}"/>
               </a:ext>
             </a:extLst>
           </p:cNvPr>
@@ -6314,18 +6315,61 @@
           <a:lstStyle/>
           <a:p>
             <a:r>
-              <a:rPr lang="en-IE" dirty="0"/>
-              <a:t>Menu to be displayed…</a:t>
-            </a:r>
+              <a:rPr lang="en-US" dirty="0"/>
+              <a:t>More on print</a:t>
+            </a:r>
+          </a:p>
+        </p:txBody>
+      </p:sp>
+      <p:sp>
+        <p:nvSpPr>
+          <p:cNvPr id="3" name="Content Placeholder 2">
+            <a:extLst>
+              <a:ext uri="{FF2B5EF4-FFF2-40B4-BE49-F238E27FC236}">
+                <a16:creationId xmlns:a16="http://schemas.microsoft.com/office/drawing/2014/main" id="{7FF39E46-23CE-C4DB-FDE0-A1E609039353}"/>
+              </a:ext>
+            </a:extLst>
+          </p:cNvPr>
+          <p:cNvSpPr>
+            <a:spLocks noGrp="1"/>
+          </p:cNvSpPr>
+          <p:nvPr>
+            <p:ph idx="1"/>
+          </p:nvPr>
+        </p:nvSpPr>
+        <p:spPr/>
+        <p:txBody>
+          <a:bodyPr/>
+          <a:lstStyle/>
+          <a:p>
+            <a:r>
+              <a:rPr lang="en-US" dirty="0"/>
+              <a:t>We have a new way to print to console in a formatted way</a:t>
+            </a:r>
+          </a:p>
+          <a:p>
+            <a:endParaRPr lang="en-US" dirty="0"/>
+          </a:p>
+          <a:p>
+            <a:endParaRPr lang="en-US" dirty="0"/>
+          </a:p>
+          <a:p>
+            <a:endParaRPr lang="en-US" dirty="0"/>
+          </a:p>
+          <a:p>
+            <a:endParaRPr lang="en-US" dirty="0"/>
+          </a:p>
+          <a:p>
+            <a:endParaRPr lang="en-US" dirty="0"/>
           </a:p>
         </p:txBody>
       </p:sp>
       <p:pic>
         <p:nvPicPr>
-          <p:cNvPr id="7" name="Picture 6">
+          <p:cNvPr id="4" name="Picture 3">
             <a:extLst>
               <a:ext uri="{FF2B5EF4-FFF2-40B4-BE49-F238E27FC236}">
-                <a16:creationId xmlns:a16="http://schemas.microsoft.com/office/drawing/2014/main" id="{1C49070A-6EBA-4189-B1BC-2E32663EC7D5}"/>
+                <a16:creationId xmlns:a16="http://schemas.microsoft.com/office/drawing/2014/main" id="{0B20F0DB-C290-383C-AFD1-6F6F6915375F}"/>
               </a:ext>
             </a:extLst>
           </p:cNvPr>
@@ -6342,24 +6386,540 @@
         </p:blipFill>
         <p:spPr>
           <a:xfrm>
-            <a:off x="854936" y="1752600"/>
-            <a:ext cx="7603264" cy="4334108"/>
+            <a:off x="1066800" y="2559050"/>
+            <a:ext cx="4457700" cy="1739900"/>
           </a:xfrm>
           <a:prstGeom prst="rect">
             <a:avLst/>
           </a:prstGeom>
-          <a:ln>
-            <a:noFill/>
-          </a:ln>
-          <a:effectLst>
-            <a:outerShdw blurRad="292100" dist="139700" dir="2700000" algn="tl" rotWithShape="0">
-              <a:srgbClr val="333333">
-                <a:alpha val="65000"/>
-              </a:srgbClr>
-            </a:outerShdw>
-          </a:effectLst>
         </p:spPr>
       </p:pic>
+      <p:pic>
+        <p:nvPicPr>
+          <p:cNvPr id="5" name="Picture 4">
+            <a:extLst>
+              <a:ext uri="{FF2B5EF4-FFF2-40B4-BE49-F238E27FC236}">
+                <a16:creationId xmlns:a16="http://schemas.microsoft.com/office/drawing/2014/main" id="{EDA16E1F-E257-543D-6123-79C2E3BC17BC}"/>
+              </a:ext>
+            </a:extLst>
+          </p:cNvPr>
+          <p:cNvPicPr>
+            <a:picLocks noChangeAspect="1"/>
+          </p:cNvPicPr>
+          <p:nvPr/>
+        </p:nvPicPr>
+        <p:blipFill>
+          <a:blip r:embed="rId3"/>
+          <a:stretch>
+            <a:fillRect/>
+          </a:stretch>
+        </p:blipFill>
+        <p:spPr>
+          <a:xfrm>
+            <a:off x="7099300" y="2690019"/>
+            <a:ext cx="4025900" cy="1168400"/>
+          </a:xfrm>
+          <a:prstGeom prst="rect">
+            <a:avLst/>
+          </a:prstGeom>
+        </p:spPr>
+      </p:pic>
+      <p:sp>
+        <p:nvSpPr>
+          <p:cNvPr id="6" name="Right Arrow 5">
+            <a:extLst>
+              <a:ext uri="{FF2B5EF4-FFF2-40B4-BE49-F238E27FC236}">
+                <a16:creationId xmlns:a16="http://schemas.microsoft.com/office/drawing/2014/main" id="{B2B08C5A-2417-B3B6-C724-776765CFBCBF}"/>
+              </a:ext>
+            </a:extLst>
+          </p:cNvPr>
+          <p:cNvSpPr/>
+          <p:nvPr/>
+        </p:nvSpPr>
+        <p:spPr>
+          <a:xfrm>
+            <a:off x="5689094" y="2938792"/>
+            <a:ext cx="1410206" cy="484632"/>
+          </a:xfrm>
+          <a:prstGeom prst="rightArrow">
+            <a:avLst/>
+          </a:prstGeom>
+        </p:spPr>
+        <p:style>
+          <a:lnRef idx="2">
+            <a:schemeClr val="accent1">
+              <a:shade val="15000"/>
+            </a:schemeClr>
+          </a:lnRef>
+          <a:fillRef idx="1">
+            <a:schemeClr val="accent1"/>
+          </a:fillRef>
+          <a:effectRef idx="0">
+            <a:schemeClr val="accent1"/>
+          </a:effectRef>
+          <a:fontRef idx="minor">
+            <a:schemeClr val="lt1"/>
+          </a:fontRef>
+        </p:style>
+        <p:txBody>
+          <a:bodyPr rtlCol="0" anchor="ctr"/>
+          <a:lstStyle/>
+          <a:p>
+            <a:pPr algn="ctr"/>
+            <a:endParaRPr lang="en-US"/>
+          </a:p>
+        </p:txBody>
+      </p:sp>
+      <p:sp>
+        <p:nvSpPr>
+          <p:cNvPr id="9" name="Rectangle: Rounded Corners 5">
+            <a:extLst>
+              <a:ext uri="{FF2B5EF4-FFF2-40B4-BE49-F238E27FC236}">
+                <a16:creationId xmlns:a16="http://schemas.microsoft.com/office/drawing/2014/main" id="{1B03277A-5A8A-0B59-4044-7202F0FB1D04}"/>
+              </a:ext>
+            </a:extLst>
+          </p:cNvPr>
+          <p:cNvSpPr/>
+          <p:nvPr/>
+        </p:nvSpPr>
+        <p:spPr>
+          <a:xfrm>
+            <a:off x="4190494" y="4452553"/>
+            <a:ext cx="2997200" cy="2108482"/>
+          </a:xfrm>
+          <a:prstGeom prst="roundRect">
+            <a:avLst/>
+          </a:prstGeom>
+        </p:spPr>
+        <p:style>
+          <a:lnRef idx="2">
+            <a:schemeClr val="accent1">
+              <a:shade val="50000"/>
+            </a:schemeClr>
+          </a:lnRef>
+          <a:fillRef idx="1">
+            <a:schemeClr val="accent1"/>
+          </a:fillRef>
+          <a:effectRef idx="0">
+            <a:schemeClr val="accent1"/>
+          </a:effectRef>
+          <a:fontRef idx="minor">
+            <a:schemeClr val="lt1"/>
+          </a:fontRef>
+        </p:style>
+        <p:txBody>
+          <a:bodyPr rtlCol="0" anchor="ctr"/>
+          <a:lstStyle/>
+          <a:p>
+            <a:pPr algn="ctr"/>
+            <a:r>
+              <a:rPr lang="en-IE" sz="2400" dirty="0"/>
+              <a:t>We are using </a:t>
+            </a:r>
+            <a:r>
+              <a:rPr lang="en-IE" sz="2400" dirty="0">
+                <a:solidFill>
+                  <a:srgbClr val="FFC000"/>
+                </a:solidFill>
+              </a:rPr>
+              <a:t>Raw</a:t>
+            </a:r>
+            <a:r>
+              <a:rPr lang="en-IE" sz="2400" dirty="0"/>
+              <a:t> </a:t>
+            </a:r>
+            <a:r>
+              <a:rPr lang="en-IE" sz="2400" dirty="0">
+                <a:solidFill>
+                  <a:srgbClr val="FFC000"/>
+                </a:solidFill>
+              </a:rPr>
+              <a:t>Strings </a:t>
+            </a:r>
+            <a:r>
+              <a:rPr lang="en-IE" sz="2400" dirty="0"/>
+              <a:t>(the triple double quotes) to format the output for the menu.</a:t>
+            </a:r>
+          </a:p>
+        </p:txBody>
+      </p:sp>
+    </p:spTree>
+    <p:extLst>
+      <p:ext uri="{BB962C8B-B14F-4D97-AF65-F5344CB8AC3E}">
+        <p14:creationId xmlns:p14="http://schemas.microsoft.com/office/powerpoint/2010/main" val="124057689"/>
+      </p:ext>
+    </p:extLst>
+  </p:cSld>
+  <p:clrMapOvr>
+    <a:masterClrMapping/>
+  </p:clrMapOvr>
+  <p:timing>
+    <p:tnLst>
+      <p:par>
+        <p:cTn id="1" dur="indefinite" restart="never" nodeType="tmRoot">
+          <p:childTnLst>
+            <p:seq concurrent="1" nextAc="seek">
+              <p:cTn id="2" dur="indefinite" nodeType="mainSeq">
+                <p:childTnLst>
+                  <p:par>
+                    <p:cTn id="3" fill="hold">
+                      <p:stCondLst>
+                        <p:cond delay="indefinite"/>
+                      </p:stCondLst>
+                      <p:childTnLst>
+                        <p:par>
+                          <p:cTn id="4" fill="hold">
+                            <p:stCondLst>
+                              <p:cond delay="0"/>
+                            </p:stCondLst>
+                            <p:childTnLst>
+                              <p:par>
+                                <p:cTn id="5" presetID="2" presetClass="entr" presetSubtype="4" fill="hold" grpId="0" nodeType="clickEffect">
+                                  <p:stCondLst>
+                                    <p:cond delay="0"/>
+                                  </p:stCondLst>
+                                  <p:childTnLst>
+                                    <p:set>
+                                      <p:cBhvr>
+                                        <p:cTn id="6" dur="1" fill="hold">
+                                          <p:stCondLst>
+                                            <p:cond delay="0"/>
+                                          </p:stCondLst>
+                                        </p:cTn>
+                                        <p:tgtEl>
+                                          <p:spTgt spid="6"/>
+                                        </p:tgtEl>
+                                        <p:attrNameLst>
+                                          <p:attrName>style.visibility</p:attrName>
+                                        </p:attrNameLst>
+                                      </p:cBhvr>
+                                      <p:to>
+                                        <p:strVal val="visible"/>
+                                      </p:to>
+                                    </p:set>
+                                    <p:anim calcmode="lin" valueType="num">
+                                      <p:cBhvr additive="base">
+                                        <p:cTn id="7" dur="500" fill="hold"/>
+                                        <p:tgtEl>
+                                          <p:spTgt spid="6"/>
+                                        </p:tgtEl>
+                                        <p:attrNameLst>
+                                          <p:attrName>ppt_x</p:attrName>
+                                        </p:attrNameLst>
+                                      </p:cBhvr>
+                                      <p:tavLst>
+                                        <p:tav tm="0">
+                                          <p:val>
+                                            <p:strVal val="#ppt_x"/>
+                                          </p:val>
+                                        </p:tav>
+                                        <p:tav tm="100000">
+                                          <p:val>
+                                            <p:strVal val="#ppt_x"/>
+                                          </p:val>
+                                        </p:tav>
+                                      </p:tavLst>
+                                    </p:anim>
+                                    <p:anim calcmode="lin" valueType="num">
+                                      <p:cBhvr additive="base">
+                                        <p:cTn id="8" dur="500" fill="hold"/>
+                                        <p:tgtEl>
+                                          <p:spTgt spid="6"/>
+                                        </p:tgtEl>
+                                        <p:attrNameLst>
+                                          <p:attrName>ppt_y</p:attrName>
+                                        </p:attrNameLst>
+                                      </p:cBhvr>
+                                      <p:tavLst>
+                                        <p:tav tm="0">
+                                          <p:val>
+                                            <p:strVal val="1+#ppt_h/2"/>
+                                          </p:val>
+                                        </p:tav>
+                                        <p:tav tm="100000">
+                                          <p:val>
+                                            <p:strVal val="#ppt_y"/>
+                                          </p:val>
+                                        </p:tav>
+                                      </p:tavLst>
+                                    </p:anim>
+                                  </p:childTnLst>
+                                </p:cTn>
+                              </p:par>
+                              <p:par>
+                                <p:cTn id="9" presetID="2" presetClass="entr" presetSubtype="4" fill="hold" nodeType="withEffect">
+                                  <p:stCondLst>
+                                    <p:cond delay="0"/>
+                                  </p:stCondLst>
+                                  <p:childTnLst>
+                                    <p:set>
+                                      <p:cBhvr>
+                                        <p:cTn id="10" dur="1" fill="hold">
+                                          <p:stCondLst>
+                                            <p:cond delay="0"/>
+                                          </p:stCondLst>
+                                        </p:cTn>
+                                        <p:tgtEl>
+                                          <p:spTgt spid="5"/>
+                                        </p:tgtEl>
+                                        <p:attrNameLst>
+                                          <p:attrName>style.visibility</p:attrName>
+                                        </p:attrNameLst>
+                                      </p:cBhvr>
+                                      <p:to>
+                                        <p:strVal val="visible"/>
+                                      </p:to>
+                                    </p:set>
+                                    <p:anim calcmode="lin" valueType="num">
+                                      <p:cBhvr additive="base">
+                                        <p:cTn id="11" dur="500" fill="hold"/>
+                                        <p:tgtEl>
+                                          <p:spTgt spid="5"/>
+                                        </p:tgtEl>
+                                        <p:attrNameLst>
+                                          <p:attrName>ppt_x</p:attrName>
+                                        </p:attrNameLst>
+                                      </p:cBhvr>
+                                      <p:tavLst>
+                                        <p:tav tm="0">
+                                          <p:val>
+                                            <p:strVal val="#ppt_x"/>
+                                          </p:val>
+                                        </p:tav>
+                                        <p:tav tm="100000">
+                                          <p:val>
+                                            <p:strVal val="#ppt_x"/>
+                                          </p:val>
+                                        </p:tav>
+                                      </p:tavLst>
+                                    </p:anim>
+                                    <p:anim calcmode="lin" valueType="num">
+                                      <p:cBhvr additive="base">
+                                        <p:cTn id="12" dur="500" fill="hold"/>
+                                        <p:tgtEl>
+                                          <p:spTgt spid="5"/>
+                                        </p:tgtEl>
+                                        <p:attrNameLst>
+                                          <p:attrName>ppt_y</p:attrName>
+                                        </p:attrNameLst>
+                                      </p:cBhvr>
+                                      <p:tavLst>
+                                        <p:tav tm="0">
+                                          <p:val>
+                                            <p:strVal val="1+#ppt_h/2"/>
+                                          </p:val>
+                                        </p:tav>
+                                        <p:tav tm="100000">
+                                          <p:val>
+                                            <p:strVal val="#ppt_y"/>
+                                          </p:val>
+                                        </p:tav>
+                                      </p:tavLst>
+                                    </p:anim>
+                                  </p:childTnLst>
+                                </p:cTn>
+                              </p:par>
+                            </p:childTnLst>
+                          </p:cTn>
+                        </p:par>
+                      </p:childTnLst>
+                    </p:cTn>
+                  </p:par>
+                  <p:par>
+                    <p:cTn id="13" fill="hold">
+                      <p:stCondLst>
+                        <p:cond delay="indefinite"/>
+                      </p:stCondLst>
+                      <p:childTnLst>
+                        <p:par>
+                          <p:cTn id="14" fill="hold">
+                            <p:stCondLst>
+                              <p:cond delay="0"/>
+                            </p:stCondLst>
+                            <p:childTnLst>
+                              <p:par>
+                                <p:cTn id="15" presetID="2" presetClass="entr" presetSubtype="4" fill="hold" grpId="0" nodeType="clickEffect">
+                                  <p:stCondLst>
+                                    <p:cond delay="0"/>
+                                  </p:stCondLst>
+                                  <p:childTnLst>
+                                    <p:set>
+                                      <p:cBhvr>
+                                        <p:cTn id="16" dur="1" fill="hold">
+                                          <p:stCondLst>
+                                            <p:cond delay="0"/>
+                                          </p:stCondLst>
+                                        </p:cTn>
+                                        <p:tgtEl>
+                                          <p:spTgt spid="9"/>
+                                        </p:tgtEl>
+                                        <p:attrNameLst>
+                                          <p:attrName>style.visibility</p:attrName>
+                                        </p:attrNameLst>
+                                      </p:cBhvr>
+                                      <p:to>
+                                        <p:strVal val="visible"/>
+                                      </p:to>
+                                    </p:set>
+                                    <p:anim calcmode="lin" valueType="num">
+                                      <p:cBhvr additive="base">
+                                        <p:cTn id="17" dur="500" fill="hold"/>
+                                        <p:tgtEl>
+                                          <p:spTgt spid="9"/>
+                                        </p:tgtEl>
+                                        <p:attrNameLst>
+                                          <p:attrName>ppt_x</p:attrName>
+                                        </p:attrNameLst>
+                                      </p:cBhvr>
+                                      <p:tavLst>
+                                        <p:tav tm="0">
+                                          <p:val>
+                                            <p:strVal val="#ppt_x"/>
+                                          </p:val>
+                                        </p:tav>
+                                        <p:tav tm="100000">
+                                          <p:val>
+                                            <p:strVal val="#ppt_x"/>
+                                          </p:val>
+                                        </p:tav>
+                                      </p:tavLst>
+                                    </p:anim>
+                                    <p:anim calcmode="lin" valueType="num">
+                                      <p:cBhvr additive="base">
+                                        <p:cTn id="18" dur="500" fill="hold"/>
+                                        <p:tgtEl>
+                                          <p:spTgt spid="9"/>
+                                        </p:tgtEl>
+                                        <p:attrNameLst>
+                                          <p:attrName>ppt_y</p:attrName>
+                                        </p:attrNameLst>
+                                      </p:cBhvr>
+                                      <p:tavLst>
+                                        <p:tav tm="0">
+                                          <p:val>
+                                            <p:strVal val="1+#ppt_h/2"/>
+                                          </p:val>
+                                        </p:tav>
+                                        <p:tav tm="100000">
+                                          <p:val>
+                                            <p:strVal val="#ppt_y"/>
+                                          </p:val>
+                                        </p:tav>
+                                      </p:tavLst>
+                                    </p:anim>
+                                  </p:childTnLst>
+                                </p:cTn>
+                              </p:par>
+                            </p:childTnLst>
+                          </p:cTn>
+                        </p:par>
+                      </p:childTnLst>
+                    </p:cTn>
+                  </p:par>
+                </p:childTnLst>
+              </p:cTn>
+              <p:prevCondLst>
+                <p:cond evt="onPrev" delay="0">
+                  <p:tgtEl>
+                    <p:sldTgt/>
+                  </p:tgtEl>
+                </p:cond>
+              </p:prevCondLst>
+              <p:nextCondLst>
+                <p:cond evt="onNext" delay="0">
+                  <p:tgtEl>
+                    <p:sldTgt/>
+                  </p:tgtEl>
+                </p:cond>
+              </p:nextCondLst>
+            </p:seq>
+          </p:childTnLst>
+        </p:cTn>
+      </p:par>
+    </p:tnLst>
+    <p:bldLst>
+      <p:bldP spid="6" grpId="0" animBg="1"/>
+      <p:bldP spid="9" grpId="0" animBg="1"/>
+    </p:bldLst>
+  </p:timing>
+</p:sld>
+</file>
+
+<file path=ppt/slides/slide11.xml><?xml version="1.0" encoding="utf-8"?>
+<p:sld xmlns:a="http://schemas.openxmlformats.org/drawingml/2006/main" xmlns:r="http://schemas.openxmlformats.org/officeDocument/2006/relationships" xmlns:p="http://schemas.openxmlformats.org/presentationml/2006/main">
+  <p:cSld>
+    <p:spTree>
+      <p:nvGrpSpPr>
+        <p:cNvPr id="1" name=""/>
+        <p:cNvGrpSpPr/>
+        <p:nvPr/>
+      </p:nvGrpSpPr>
+      <p:grpSpPr>
+        <a:xfrm>
+          <a:off x="0" y="0"/>
+          <a:ext cx="0" cy="0"/>
+          <a:chOff x="0" y="0"/>
+          <a:chExt cx="0" cy="0"/>
+        </a:xfrm>
+      </p:grpSpPr>
+      <p:pic>
+        <p:nvPicPr>
+          <p:cNvPr id="4" name="Picture 3">
+            <a:extLst>
+              <a:ext uri="{FF2B5EF4-FFF2-40B4-BE49-F238E27FC236}">
+                <a16:creationId xmlns:a16="http://schemas.microsoft.com/office/drawing/2014/main" id="{3055D4F7-D5D7-4FA3-4B6F-34A169CD9732}"/>
+              </a:ext>
+            </a:extLst>
+          </p:cNvPr>
+          <p:cNvPicPr>
+            <a:picLocks noChangeAspect="1"/>
+          </p:cNvPicPr>
+          <p:nvPr/>
+        </p:nvPicPr>
+        <p:blipFill>
+          <a:blip r:embed="rId2"/>
+          <a:stretch>
+            <a:fillRect/>
+          </a:stretch>
+        </p:blipFill>
+        <p:spPr>
+          <a:xfrm>
+            <a:off x="457200" y="1943100"/>
+            <a:ext cx="7772400" cy="3936524"/>
+          </a:xfrm>
+          <a:prstGeom prst="rect">
+            <a:avLst/>
+          </a:prstGeom>
+        </p:spPr>
+      </p:pic>
+      <p:sp>
+        <p:nvSpPr>
+          <p:cNvPr id="2" name="Title 1">
+            <a:extLst>
+              <a:ext uri="{FF2B5EF4-FFF2-40B4-BE49-F238E27FC236}">
+                <a16:creationId xmlns:a16="http://schemas.microsoft.com/office/drawing/2014/main" id="{B224850E-FD0D-4AE2-A26F-3F544CDC8E33}"/>
+              </a:ext>
+            </a:extLst>
+          </p:cNvPr>
+          <p:cNvSpPr>
+            <a:spLocks noGrp="1"/>
+          </p:cNvSpPr>
+          <p:nvPr>
+            <p:ph type="title"/>
+          </p:nvPr>
+        </p:nvSpPr>
+        <p:spPr/>
+        <p:txBody>
+          <a:bodyPr/>
+          <a:lstStyle/>
+          <a:p>
+            <a:r>
+              <a:rPr lang="en-IE" dirty="0"/>
+              <a:t>Menu to be displayed…</a:t>
+            </a:r>
+          </a:p>
+        </p:txBody>
+      </p:sp>
       <p:sp>
         <p:nvSpPr>
           <p:cNvPr id="3" name="Rectangle: Rounded Corners 2">
@@ -6374,7 +6934,7 @@
         </p:nvSpPr>
         <p:spPr>
           <a:xfrm>
-            <a:off x="6858000" y="1600200"/>
+            <a:off x="4724400" y="1600200"/>
             <a:ext cx="1905000" cy="685800"/>
           </a:xfrm>
           <a:prstGeom prst="roundRect">
@@ -6409,93 +6969,171 @@
           </a:p>
         </p:txBody>
       </p:sp>
-      <p:sp>
-        <p:nvSpPr>
-          <p:cNvPr id="6" name="Rectangle: Rounded Corners 5">
+      <p:pic>
+        <p:nvPicPr>
+          <p:cNvPr id="5" name="Picture 4">
             <a:extLst>
               <a:ext uri="{FF2B5EF4-FFF2-40B4-BE49-F238E27FC236}">
-                <a16:creationId xmlns:a16="http://schemas.microsoft.com/office/drawing/2014/main" id="{1BEC2FD1-4C69-4AB0-90B8-FA4F7890FE01}"/>
+                <a16:creationId xmlns:a16="http://schemas.microsoft.com/office/drawing/2014/main" id="{E8ACB7E2-9577-50E0-B970-BA66E972C5AF}"/>
               </a:ext>
             </a:extLst>
           </p:cNvPr>
-          <p:cNvSpPr/>
+          <p:cNvPicPr>
+            <a:picLocks noChangeAspect="1"/>
+          </p:cNvPicPr>
           <p:nvPr/>
-        </p:nvSpPr>
-        <p:spPr>
-          <a:xfrm>
-            <a:off x="8305800" y="2438400"/>
-            <a:ext cx="3429000" cy="2514600"/>
-          </a:xfrm>
-          <a:prstGeom prst="roundRect">
+        </p:nvPicPr>
+        <p:blipFill>
+          <a:blip r:embed="rId3"/>
+          <a:stretch>
+            <a:fillRect/>
+          </a:stretch>
+        </p:blipFill>
+        <p:spPr>
+          <a:xfrm>
+            <a:off x="7283588" y="2468562"/>
+            <a:ext cx="4436464" cy="1642636"/>
+          </a:xfrm>
+          <a:prstGeom prst="rect">
             <a:avLst/>
           </a:prstGeom>
         </p:spPr>
-        <p:style>
-          <a:lnRef idx="2">
-            <a:schemeClr val="accent1">
-              <a:shade val="50000"/>
-            </a:schemeClr>
-          </a:lnRef>
-          <a:fillRef idx="1">
-            <a:schemeClr val="accent1"/>
-          </a:fillRef>
-          <a:effectRef idx="0">
-            <a:schemeClr val="accent1"/>
-          </a:effectRef>
-          <a:fontRef idx="minor">
-            <a:schemeClr val="lt1"/>
-          </a:fontRef>
-        </p:style>
-        <p:txBody>
-          <a:bodyPr rtlCol="0" anchor="ctr"/>
-          <a:lstStyle/>
-          <a:p>
-            <a:pPr algn="ctr"/>
-            <a:r>
-              <a:rPr lang="en-IE" sz="2400" dirty="0"/>
-              <a:t>We are using </a:t>
-            </a:r>
-            <a:r>
-              <a:rPr lang="en-IE" sz="2400" dirty="0">
-                <a:solidFill>
-                  <a:srgbClr val="FFC000"/>
-                </a:solidFill>
-              </a:rPr>
-              <a:t>Raw</a:t>
-            </a:r>
-            <a:r>
-              <a:rPr lang="en-IE" sz="2400" dirty="0"/>
-              <a:t> </a:t>
-            </a:r>
-            <a:r>
-              <a:rPr lang="en-IE" sz="2400" dirty="0">
-                <a:solidFill>
-                  <a:srgbClr val="FFC000"/>
-                </a:solidFill>
-              </a:rPr>
-              <a:t>Strings </a:t>
-            </a:r>
-            <a:r>
-              <a:rPr lang="en-IE" sz="2400" dirty="0"/>
-              <a:t>(the triple double quotes) to format the output for the menu.</a:t>
-            </a:r>
-          </a:p>
-        </p:txBody>
-      </p:sp>
+      </p:pic>
     </p:spTree>
     <p:extLst>
       <p:ext uri="{BB962C8B-B14F-4D97-AF65-F5344CB8AC3E}">
-        <p14:creationId xmlns:p14="http://schemas.microsoft.com/office/powerpoint/2010/main" val="4098638643"/>
+        <p14:creationId xmlns:p14="http://schemas.microsoft.com/office/powerpoint/2010/main" val="956956018"/>
       </p:ext>
     </p:extLst>
   </p:cSld>
   <p:clrMapOvr>
     <a:masterClrMapping/>
   </p:clrMapOvr>
+  <p:timing>
+    <p:tnLst>
+      <p:par>
+        <p:cTn id="1" dur="indefinite" restart="never" nodeType="tmRoot">
+          <p:childTnLst>
+            <p:seq concurrent="1" nextAc="seek">
+              <p:cTn id="2" dur="indefinite" nodeType="mainSeq">
+                <p:childTnLst>
+                  <p:par>
+                    <p:cTn id="3" fill="hold">
+                      <p:stCondLst>
+                        <p:cond delay="indefinite"/>
+                      </p:stCondLst>
+                      <p:childTnLst>
+                        <p:par>
+                          <p:cTn id="4" fill="hold">
+                            <p:stCondLst>
+                              <p:cond delay="0"/>
+                            </p:stCondLst>
+                            <p:childTnLst>
+                              <p:par>
+                                <p:cTn id="5" presetID="2" presetClass="entr" presetSubtype="4" fill="hold" nodeType="clickEffect">
+                                  <p:stCondLst>
+                                    <p:cond delay="0"/>
+                                  </p:stCondLst>
+                                  <p:childTnLst>
+                                    <p:set>
+                                      <p:cBhvr>
+                                        <p:cTn id="6" dur="1" fill="hold">
+                                          <p:stCondLst>
+                                            <p:cond delay="0"/>
+                                          </p:stCondLst>
+                                        </p:cTn>
+                                        <p:tgtEl>
+                                          <p:spTgt spid="5"/>
+                                        </p:tgtEl>
+                                        <p:attrNameLst>
+                                          <p:attrName>style.visibility</p:attrName>
+                                        </p:attrNameLst>
+                                      </p:cBhvr>
+                                      <p:to>
+                                        <p:strVal val="visible"/>
+                                      </p:to>
+                                    </p:set>
+                                    <p:anim calcmode="lin" valueType="num">
+                                      <p:cBhvr additive="base">
+                                        <p:cTn id="7" dur="500" fill="hold"/>
+                                        <p:tgtEl>
+                                          <p:spTgt spid="5"/>
+                                        </p:tgtEl>
+                                        <p:attrNameLst>
+                                          <p:attrName>ppt_x</p:attrName>
+                                        </p:attrNameLst>
+                                      </p:cBhvr>
+                                      <p:tavLst>
+                                        <p:tav tm="0">
+                                          <p:val>
+                                            <p:strVal val="#ppt_x"/>
+                                          </p:val>
+                                        </p:tav>
+                                        <p:tav tm="100000">
+                                          <p:val>
+                                            <p:strVal val="#ppt_x"/>
+                                          </p:val>
+                                        </p:tav>
+                                      </p:tavLst>
+                                    </p:anim>
+                                    <p:anim calcmode="lin" valueType="num">
+                                      <p:cBhvr additive="base">
+                                        <p:cTn id="8" dur="500" fill="hold"/>
+                                        <p:tgtEl>
+                                          <p:spTgt spid="5"/>
+                                        </p:tgtEl>
+                                        <p:attrNameLst>
+                                          <p:attrName>ppt_y</p:attrName>
+                                        </p:attrNameLst>
+                                      </p:cBhvr>
+                                      <p:tavLst>
+                                        <p:tav tm="0">
+                                          <p:val>
+                                            <p:strVal val="1+#ppt_h/2"/>
+                                          </p:val>
+                                        </p:tav>
+                                        <p:tav tm="100000">
+                                          <p:val>
+                                            <p:strVal val="#ppt_y"/>
+                                          </p:val>
+                                        </p:tav>
+                                      </p:tavLst>
+                                    </p:anim>
+                                  </p:childTnLst>
+                                </p:cTn>
+                              </p:par>
+                            </p:childTnLst>
+                          </p:cTn>
+                        </p:par>
+                      </p:childTnLst>
+                    </p:cTn>
+                  </p:par>
+                </p:childTnLst>
+              </p:cTn>
+              <p:prevCondLst>
+                <p:cond evt="onPrev" delay="0">
+                  <p:tgtEl>
+                    <p:sldTgt/>
+                  </p:tgtEl>
+                </p:cond>
+              </p:prevCondLst>
+              <p:nextCondLst>
+                <p:cond evt="onNext" delay="0">
+                  <p:tgtEl>
+                    <p:sldTgt/>
+                  </p:tgtEl>
+                </p:cond>
+              </p:nextCondLst>
+            </p:seq>
+          </p:childTnLst>
+        </p:cTn>
+      </p:par>
+    </p:tnLst>
+  </p:timing>
 </p:sld>
 </file>
 
-<file path=ppt/slides/slide11.xml><?xml version="1.0" encoding="utf-8"?>
+<file path=ppt/slides/slide12.xml><?xml version="1.0" encoding="utf-8"?>
 <p:sld xmlns:a="http://schemas.openxmlformats.org/drawingml/2006/main" xmlns:r="http://schemas.openxmlformats.org/officeDocument/2006/relationships" xmlns:p="http://schemas.openxmlformats.org/presentationml/2006/main">
   <p:cSld>
     <p:spTree>
@@ -6642,7 +7280,7 @@
 </p:sld>
 </file>
 
-<file path=ppt/slides/slide12.xml><?xml version="1.0" encoding="utf-8"?>
+<file path=ppt/slides/slide13.xml><?xml version="1.0" encoding="utf-8"?>
 <p:sld xmlns:a="http://schemas.openxmlformats.org/drawingml/2006/main" xmlns:r="http://schemas.openxmlformats.org/officeDocument/2006/relationships" xmlns:p="http://schemas.openxmlformats.org/presentationml/2006/main">
   <p:cSld>
     <p:spTree>
@@ -6837,7 +7475,7 @@
 </p:sld>
 </file>
 
-<file path=ppt/slides/slide13.xml><?xml version="1.0" encoding="utf-8"?>
+<file path=ppt/slides/slide14.xml><?xml version="1.0" encoding="utf-8"?>
 <p:sld xmlns:a="http://schemas.openxmlformats.org/drawingml/2006/main" xmlns:r="http://schemas.openxmlformats.org/officeDocument/2006/relationships" xmlns:p="http://schemas.openxmlformats.org/presentationml/2006/main">
   <p:cSld>
     <p:spTree>
@@ -7010,7 +7648,7 @@
 </p:sld>
 </file>
 
-<file path=ppt/slides/slide14.xml><?xml version="1.0" encoding="utf-8"?>
+<file path=ppt/slides/slide15.xml><?xml version="1.0" encoding="utf-8"?>
 <p:sld xmlns:a="http://schemas.openxmlformats.org/drawingml/2006/main" xmlns:r="http://schemas.openxmlformats.org/officeDocument/2006/relationships" xmlns:p="http://schemas.openxmlformats.org/presentationml/2006/main">
   <p:cSld>
     <p:spTree>
@@ -7386,10 +8024,10 @@
       </p:grpSpPr>
       <p:pic>
         <p:nvPicPr>
-          <p:cNvPr id="7" name="Picture 6">
+          <p:cNvPr id="11" name="Picture 10">
             <a:extLst>
               <a:ext uri="{FF2B5EF4-FFF2-40B4-BE49-F238E27FC236}">
-                <a16:creationId xmlns:a16="http://schemas.microsoft.com/office/drawing/2014/main" id="{E06C025C-B06A-4E57-9483-0F0C5B0DFD03}"/>
+                <a16:creationId xmlns:a16="http://schemas.microsoft.com/office/drawing/2014/main" id="{80C12E1D-2023-E10E-05D2-74395218F6F9}"/>
               </a:ext>
             </a:extLst>
           </p:cNvPr>
@@ -7406,22 +8044,12 @@
         </p:blipFill>
         <p:spPr>
           <a:xfrm>
-            <a:off x="2680283" y="1898985"/>
-            <a:ext cx="8902117" cy="4481755"/>
+            <a:off x="2762067" y="1811062"/>
+            <a:ext cx="9105208" cy="4772300"/>
           </a:xfrm>
           <a:prstGeom prst="rect">
             <a:avLst/>
           </a:prstGeom>
-          <a:ln>
-            <a:noFill/>
-          </a:ln>
-          <a:effectLst>
-            <a:outerShdw blurRad="292100" dist="139700" dir="2700000" algn="tl" rotWithShape="0">
-              <a:srgbClr val="333333">
-                <a:alpha val="65000"/>
-              </a:srgbClr>
-            </a:outerShdw>
-          </a:effectLst>
         </p:spPr>
       </p:pic>
       <p:sp>
@@ -7505,8 +8133,8 @@
         </p:nvCxnSpPr>
         <p:spPr>
           <a:xfrm flipV="1">
-            <a:off x="2382125" y="2628900"/>
-            <a:ext cx="665875" cy="800100"/>
+            <a:off x="2382125" y="2590800"/>
+            <a:ext cx="894475" cy="838200"/>
           </a:xfrm>
           <a:prstGeom prst="straightConnector1">
             <a:avLst/>
@@ -7541,8 +8169,8 @@
         </p:nvCxnSpPr>
         <p:spPr>
           <a:xfrm flipV="1">
-            <a:off x="2382125" y="3200400"/>
-            <a:ext cx="665875" cy="228600"/>
+            <a:off x="2382125" y="3276600"/>
+            <a:ext cx="1503017" cy="152400"/>
           </a:xfrm>
           <a:prstGeom prst="straightConnector1">
             <a:avLst/>
@@ -7571,14 +8199,13 @@
           <p:cNvPr id="10" name="Straight Arrow Connector 9"/>
           <p:cNvCxnSpPr>
             <a:cxnSpLocks/>
-            <a:stCxn id="3" idx="3"/>
           </p:cNvCxnSpPr>
           <p:nvPr/>
         </p:nvCxnSpPr>
         <p:spPr>
           <a:xfrm>
-            <a:off x="2382125" y="3429000"/>
-            <a:ext cx="1123075" cy="2133600"/>
+            <a:off x="2385842" y="3428999"/>
+            <a:ext cx="1270700" cy="1973370"/>
           </a:xfrm>
           <a:prstGeom prst="straightConnector1">
             <a:avLst/>
@@ -7602,6 +8229,36 @@
           </a:fontRef>
         </p:style>
       </p:cxnSp>
+      <p:pic>
+        <p:nvPicPr>
+          <p:cNvPr id="9" name="Picture 8">
+            <a:extLst>
+              <a:ext uri="{FF2B5EF4-FFF2-40B4-BE49-F238E27FC236}">
+                <a16:creationId xmlns:a16="http://schemas.microsoft.com/office/drawing/2014/main" id="{0C4512F6-ACFF-FD03-44E5-9B685942FC86}"/>
+              </a:ext>
+            </a:extLst>
+          </p:cNvPr>
+          <p:cNvPicPr>
+            <a:picLocks noChangeAspect="1"/>
+          </p:cNvPicPr>
+          <p:nvPr/>
+        </p:nvPicPr>
+        <p:blipFill>
+          <a:blip r:embed="rId3"/>
+          <a:stretch>
+            <a:fillRect/>
+          </a:stretch>
+        </p:blipFill>
+        <p:spPr>
+          <a:xfrm>
+            <a:off x="8674100" y="185738"/>
+            <a:ext cx="2908300" cy="1231900"/>
+          </a:xfrm>
+          <a:prstGeom prst="rect">
+            <a:avLst/>
+          </a:prstGeom>
+        </p:spPr>
+      </p:pic>
     </p:spTree>
     <p:extLst>
       <p:ext uri="{BB962C8B-B14F-4D97-AF65-F5344CB8AC3E}">
@@ -7612,6 +8269,531 @@
   <p:clrMapOvr>
     <a:masterClrMapping/>
   </p:clrMapOvr>
+  <p:timing>
+    <p:tnLst>
+      <p:par>
+        <p:cTn id="1" dur="indefinite" restart="never" nodeType="tmRoot">
+          <p:childTnLst>
+            <p:seq concurrent="1" nextAc="seek">
+              <p:cTn id="2" dur="indefinite" nodeType="mainSeq">
+                <p:childTnLst>
+                  <p:par>
+                    <p:cTn id="3" fill="hold">
+                      <p:stCondLst>
+                        <p:cond delay="indefinite"/>
+                      </p:stCondLst>
+                      <p:childTnLst>
+                        <p:par>
+                          <p:cTn id="4" fill="hold">
+                            <p:stCondLst>
+                              <p:cond delay="0"/>
+                            </p:stCondLst>
+                            <p:childTnLst>
+                              <p:par>
+                                <p:cTn id="5" presetID="2" presetClass="entr" presetSubtype="4" fill="hold" nodeType="clickEffect">
+                                  <p:stCondLst>
+                                    <p:cond delay="0"/>
+                                  </p:stCondLst>
+                                  <p:childTnLst>
+                                    <p:set>
+                                      <p:cBhvr>
+                                        <p:cTn id="6" dur="1" fill="hold">
+                                          <p:stCondLst>
+                                            <p:cond delay="0"/>
+                                          </p:stCondLst>
+                                        </p:cTn>
+                                        <p:tgtEl>
+                                          <p:spTgt spid="9"/>
+                                        </p:tgtEl>
+                                        <p:attrNameLst>
+                                          <p:attrName>style.visibility</p:attrName>
+                                        </p:attrNameLst>
+                                      </p:cBhvr>
+                                      <p:to>
+                                        <p:strVal val="visible"/>
+                                      </p:to>
+                                    </p:set>
+                                    <p:anim calcmode="lin" valueType="num">
+                                      <p:cBhvr additive="base">
+                                        <p:cTn id="7" dur="500" fill="hold"/>
+                                        <p:tgtEl>
+                                          <p:spTgt spid="9"/>
+                                        </p:tgtEl>
+                                        <p:attrNameLst>
+                                          <p:attrName>ppt_x</p:attrName>
+                                        </p:attrNameLst>
+                                      </p:cBhvr>
+                                      <p:tavLst>
+                                        <p:tav tm="0">
+                                          <p:val>
+                                            <p:strVal val="#ppt_x"/>
+                                          </p:val>
+                                        </p:tav>
+                                        <p:tav tm="100000">
+                                          <p:val>
+                                            <p:strVal val="#ppt_x"/>
+                                          </p:val>
+                                        </p:tav>
+                                      </p:tavLst>
+                                    </p:anim>
+                                    <p:anim calcmode="lin" valueType="num">
+                                      <p:cBhvr additive="base">
+                                        <p:cTn id="8" dur="500" fill="hold"/>
+                                        <p:tgtEl>
+                                          <p:spTgt spid="9"/>
+                                        </p:tgtEl>
+                                        <p:attrNameLst>
+                                          <p:attrName>ppt_y</p:attrName>
+                                        </p:attrNameLst>
+                                      </p:cBhvr>
+                                      <p:tavLst>
+                                        <p:tav tm="0">
+                                          <p:val>
+                                            <p:strVal val="1+#ppt_h/2"/>
+                                          </p:val>
+                                        </p:tav>
+                                        <p:tav tm="100000">
+                                          <p:val>
+                                            <p:strVal val="#ppt_y"/>
+                                          </p:val>
+                                        </p:tav>
+                                      </p:tavLst>
+                                    </p:anim>
+                                  </p:childTnLst>
+                                </p:cTn>
+                              </p:par>
+                            </p:childTnLst>
+                          </p:cTn>
+                        </p:par>
+                      </p:childTnLst>
+                    </p:cTn>
+                  </p:par>
+                  <p:par>
+                    <p:cTn id="9" fill="hold">
+                      <p:stCondLst>
+                        <p:cond delay="indefinite"/>
+                      </p:stCondLst>
+                      <p:childTnLst>
+                        <p:par>
+                          <p:cTn id="10" fill="hold">
+                            <p:stCondLst>
+                              <p:cond delay="0"/>
+                            </p:stCondLst>
+                            <p:childTnLst>
+                              <p:par>
+                                <p:cTn id="11" presetID="2" presetClass="entr" presetSubtype="4" fill="hold" nodeType="clickEffect">
+                                  <p:stCondLst>
+                                    <p:cond delay="0"/>
+                                  </p:stCondLst>
+                                  <p:childTnLst>
+                                    <p:set>
+                                      <p:cBhvr>
+                                        <p:cTn id="12" dur="1" fill="hold">
+                                          <p:stCondLst>
+                                            <p:cond delay="0"/>
+                                          </p:stCondLst>
+                                        </p:cTn>
+                                        <p:tgtEl>
+                                          <p:spTgt spid="11"/>
+                                        </p:tgtEl>
+                                        <p:attrNameLst>
+                                          <p:attrName>style.visibility</p:attrName>
+                                        </p:attrNameLst>
+                                      </p:cBhvr>
+                                      <p:to>
+                                        <p:strVal val="visible"/>
+                                      </p:to>
+                                    </p:set>
+                                    <p:anim calcmode="lin" valueType="num">
+                                      <p:cBhvr additive="base">
+                                        <p:cTn id="13" dur="500" fill="hold"/>
+                                        <p:tgtEl>
+                                          <p:spTgt spid="11"/>
+                                        </p:tgtEl>
+                                        <p:attrNameLst>
+                                          <p:attrName>ppt_x</p:attrName>
+                                        </p:attrNameLst>
+                                      </p:cBhvr>
+                                      <p:tavLst>
+                                        <p:tav tm="0">
+                                          <p:val>
+                                            <p:strVal val="#ppt_x"/>
+                                          </p:val>
+                                        </p:tav>
+                                        <p:tav tm="100000">
+                                          <p:val>
+                                            <p:strVal val="#ppt_x"/>
+                                          </p:val>
+                                        </p:tav>
+                                      </p:tavLst>
+                                    </p:anim>
+                                    <p:anim calcmode="lin" valueType="num">
+                                      <p:cBhvr additive="base">
+                                        <p:cTn id="14" dur="500" fill="hold"/>
+                                        <p:tgtEl>
+                                          <p:spTgt spid="11"/>
+                                        </p:tgtEl>
+                                        <p:attrNameLst>
+                                          <p:attrName>ppt_y</p:attrName>
+                                        </p:attrNameLst>
+                                      </p:cBhvr>
+                                      <p:tavLst>
+                                        <p:tav tm="0">
+                                          <p:val>
+                                            <p:strVal val="1+#ppt_h/2"/>
+                                          </p:val>
+                                        </p:tav>
+                                        <p:tav tm="100000">
+                                          <p:val>
+                                            <p:strVal val="#ppt_y"/>
+                                          </p:val>
+                                        </p:tav>
+                                      </p:tavLst>
+                                    </p:anim>
+                                  </p:childTnLst>
+                                </p:cTn>
+                              </p:par>
+                            </p:childTnLst>
+                          </p:cTn>
+                        </p:par>
+                      </p:childTnLst>
+                    </p:cTn>
+                  </p:par>
+                  <p:par>
+                    <p:cTn id="15" fill="hold">
+                      <p:stCondLst>
+                        <p:cond delay="indefinite"/>
+                      </p:stCondLst>
+                      <p:childTnLst>
+                        <p:par>
+                          <p:cTn id="16" fill="hold">
+                            <p:stCondLst>
+                              <p:cond delay="0"/>
+                            </p:stCondLst>
+                            <p:childTnLst>
+                              <p:par>
+                                <p:cTn id="17" presetID="2" presetClass="entr" presetSubtype="4" fill="hold" grpId="0" nodeType="clickEffect">
+                                  <p:stCondLst>
+                                    <p:cond delay="0"/>
+                                  </p:stCondLst>
+                                  <p:childTnLst>
+                                    <p:set>
+                                      <p:cBhvr>
+                                        <p:cTn id="18" dur="1" fill="hold">
+                                          <p:stCondLst>
+                                            <p:cond delay="0"/>
+                                          </p:stCondLst>
+                                        </p:cTn>
+                                        <p:tgtEl>
+                                          <p:spTgt spid="3"/>
+                                        </p:tgtEl>
+                                        <p:attrNameLst>
+                                          <p:attrName>style.visibility</p:attrName>
+                                        </p:attrNameLst>
+                                      </p:cBhvr>
+                                      <p:to>
+                                        <p:strVal val="visible"/>
+                                      </p:to>
+                                    </p:set>
+                                    <p:anim calcmode="lin" valueType="num">
+                                      <p:cBhvr additive="base">
+                                        <p:cTn id="19" dur="500" fill="hold"/>
+                                        <p:tgtEl>
+                                          <p:spTgt spid="3"/>
+                                        </p:tgtEl>
+                                        <p:attrNameLst>
+                                          <p:attrName>ppt_x</p:attrName>
+                                        </p:attrNameLst>
+                                      </p:cBhvr>
+                                      <p:tavLst>
+                                        <p:tav tm="0">
+                                          <p:val>
+                                            <p:strVal val="#ppt_x"/>
+                                          </p:val>
+                                        </p:tav>
+                                        <p:tav tm="100000">
+                                          <p:val>
+                                            <p:strVal val="#ppt_x"/>
+                                          </p:val>
+                                        </p:tav>
+                                      </p:tavLst>
+                                    </p:anim>
+                                    <p:anim calcmode="lin" valueType="num">
+                                      <p:cBhvr additive="base">
+                                        <p:cTn id="20" dur="500" fill="hold"/>
+                                        <p:tgtEl>
+                                          <p:spTgt spid="3"/>
+                                        </p:tgtEl>
+                                        <p:attrNameLst>
+                                          <p:attrName>ppt_y</p:attrName>
+                                        </p:attrNameLst>
+                                      </p:cBhvr>
+                                      <p:tavLst>
+                                        <p:tav tm="0">
+                                          <p:val>
+                                            <p:strVal val="1+#ppt_h/2"/>
+                                          </p:val>
+                                        </p:tav>
+                                        <p:tav tm="100000">
+                                          <p:val>
+                                            <p:strVal val="#ppt_y"/>
+                                          </p:val>
+                                        </p:tav>
+                                      </p:tavLst>
+                                    </p:anim>
+                                  </p:childTnLst>
+                                </p:cTn>
+                              </p:par>
+                              <p:par>
+                                <p:cTn id="21" presetID="2" presetClass="entr" presetSubtype="4" fill="hold" nodeType="withEffect">
+                                  <p:stCondLst>
+                                    <p:cond delay="0"/>
+                                  </p:stCondLst>
+                                  <p:childTnLst>
+                                    <p:set>
+                                      <p:cBhvr>
+                                        <p:cTn id="22" dur="1" fill="hold">
+                                          <p:stCondLst>
+                                            <p:cond delay="0"/>
+                                          </p:stCondLst>
+                                        </p:cTn>
+                                        <p:tgtEl>
+                                          <p:spTgt spid="6"/>
+                                        </p:tgtEl>
+                                        <p:attrNameLst>
+                                          <p:attrName>style.visibility</p:attrName>
+                                        </p:attrNameLst>
+                                      </p:cBhvr>
+                                      <p:to>
+                                        <p:strVal val="visible"/>
+                                      </p:to>
+                                    </p:set>
+                                    <p:anim calcmode="lin" valueType="num">
+                                      <p:cBhvr additive="base">
+                                        <p:cTn id="23" dur="500" fill="hold"/>
+                                        <p:tgtEl>
+                                          <p:spTgt spid="6"/>
+                                        </p:tgtEl>
+                                        <p:attrNameLst>
+                                          <p:attrName>ppt_x</p:attrName>
+                                        </p:attrNameLst>
+                                      </p:cBhvr>
+                                      <p:tavLst>
+                                        <p:tav tm="0">
+                                          <p:val>
+                                            <p:strVal val="#ppt_x"/>
+                                          </p:val>
+                                        </p:tav>
+                                        <p:tav tm="100000">
+                                          <p:val>
+                                            <p:strVal val="#ppt_x"/>
+                                          </p:val>
+                                        </p:tav>
+                                      </p:tavLst>
+                                    </p:anim>
+                                    <p:anim calcmode="lin" valueType="num">
+                                      <p:cBhvr additive="base">
+                                        <p:cTn id="24" dur="500" fill="hold"/>
+                                        <p:tgtEl>
+                                          <p:spTgt spid="6"/>
+                                        </p:tgtEl>
+                                        <p:attrNameLst>
+                                          <p:attrName>ppt_y</p:attrName>
+                                        </p:attrNameLst>
+                                      </p:cBhvr>
+                                      <p:tavLst>
+                                        <p:tav tm="0">
+                                          <p:val>
+                                            <p:strVal val="1+#ppt_h/2"/>
+                                          </p:val>
+                                        </p:tav>
+                                        <p:tav tm="100000">
+                                          <p:val>
+                                            <p:strVal val="#ppt_y"/>
+                                          </p:val>
+                                        </p:tav>
+                                      </p:tavLst>
+                                    </p:anim>
+                                  </p:childTnLst>
+                                </p:cTn>
+                              </p:par>
+                              <p:par>
+                                <p:cTn id="25" presetID="2" presetClass="entr" presetSubtype="4" fill="hold" nodeType="withEffect">
+                                  <p:stCondLst>
+                                    <p:cond delay="0"/>
+                                  </p:stCondLst>
+                                  <p:childTnLst>
+                                    <p:set>
+                                      <p:cBhvr>
+                                        <p:cTn id="26" dur="1" fill="hold">
+                                          <p:stCondLst>
+                                            <p:cond delay="0"/>
+                                          </p:stCondLst>
+                                        </p:cTn>
+                                        <p:tgtEl>
+                                          <p:spTgt spid="8"/>
+                                        </p:tgtEl>
+                                        <p:attrNameLst>
+                                          <p:attrName>style.visibility</p:attrName>
+                                        </p:attrNameLst>
+                                      </p:cBhvr>
+                                      <p:to>
+                                        <p:strVal val="visible"/>
+                                      </p:to>
+                                    </p:set>
+                                    <p:anim calcmode="lin" valueType="num">
+                                      <p:cBhvr additive="base">
+                                        <p:cTn id="27" dur="500" fill="hold"/>
+                                        <p:tgtEl>
+                                          <p:spTgt spid="8"/>
+                                        </p:tgtEl>
+                                        <p:attrNameLst>
+                                          <p:attrName>ppt_x</p:attrName>
+                                        </p:attrNameLst>
+                                      </p:cBhvr>
+                                      <p:tavLst>
+                                        <p:tav tm="0">
+                                          <p:val>
+                                            <p:strVal val="#ppt_x"/>
+                                          </p:val>
+                                        </p:tav>
+                                        <p:tav tm="100000">
+                                          <p:val>
+                                            <p:strVal val="#ppt_x"/>
+                                          </p:val>
+                                        </p:tav>
+                                      </p:tavLst>
+                                    </p:anim>
+                                    <p:anim calcmode="lin" valueType="num">
+                                      <p:cBhvr additive="base">
+                                        <p:cTn id="28" dur="500" fill="hold"/>
+                                        <p:tgtEl>
+                                          <p:spTgt spid="8"/>
+                                        </p:tgtEl>
+                                        <p:attrNameLst>
+                                          <p:attrName>ppt_y</p:attrName>
+                                        </p:attrNameLst>
+                                      </p:cBhvr>
+                                      <p:tavLst>
+                                        <p:tav tm="0">
+                                          <p:val>
+                                            <p:strVal val="1+#ppt_h/2"/>
+                                          </p:val>
+                                        </p:tav>
+                                        <p:tav tm="100000">
+                                          <p:val>
+                                            <p:strVal val="#ppt_y"/>
+                                          </p:val>
+                                        </p:tav>
+                                      </p:tavLst>
+                                    </p:anim>
+                                  </p:childTnLst>
+                                </p:cTn>
+                              </p:par>
+                              <p:par>
+                                <p:cTn id="29" presetID="2" presetClass="entr" presetSubtype="4" fill="hold" nodeType="withEffect">
+                                  <p:stCondLst>
+                                    <p:cond delay="0"/>
+                                  </p:stCondLst>
+                                  <p:childTnLst>
+                                    <p:set>
+                                      <p:cBhvr>
+                                        <p:cTn id="30" dur="1" fill="hold">
+                                          <p:stCondLst>
+                                            <p:cond delay="0"/>
+                                          </p:stCondLst>
+                                        </p:cTn>
+                                        <p:tgtEl>
+                                          <p:spTgt spid="10"/>
+                                        </p:tgtEl>
+                                        <p:attrNameLst>
+                                          <p:attrName>style.visibility</p:attrName>
+                                        </p:attrNameLst>
+                                      </p:cBhvr>
+                                      <p:to>
+                                        <p:strVal val="visible"/>
+                                      </p:to>
+                                    </p:set>
+                                    <p:anim calcmode="lin" valueType="num">
+                                      <p:cBhvr additive="base">
+                                        <p:cTn id="31" dur="500" fill="hold"/>
+                                        <p:tgtEl>
+                                          <p:spTgt spid="10"/>
+                                        </p:tgtEl>
+                                        <p:attrNameLst>
+                                          <p:attrName>ppt_x</p:attrName>
+                                        </p:attrNameLst>
+                                      </p:cBhvr>
+                                      <p:tavLst>
+                                        <p:tav tm="0">
+                                          <p:val>
+                                            <p:strVal val="#ppt_x"/>
+                                          </p:val>
+                                        </p:tav>
+                                        <p:tav tm="100000">
+                                          <p:val>
+                                            <p:strVal val="#ppt_x"/>
+                                          </p:val>
+                                        </p:tav>
+                                      </p:tavLst>
+                                    </p:anim>
+                                    <p:anim calcmode="lin" valueType="num">
+                                      <p:cBhvr additive="base">
+                                        <p:cTn id="32" dur="500" fill="hold"/>
+                                        <p:tgtEl>
+                                          <p:spTgt spid="10"/>
+                                        </p:tgtEl>
+                                        <p:attrNameLst>
+                                          <p:attrName>ppt_y</p:attrName>
+                                        </p:attrNameLst>
+                                      </p:cBhvr>
+                                      <p:tavLst>
+                                        <p:tav tm="0">
+                                          <p:val>
+                                            <p:strVal val="1+#ppt_h/2"/>
+                                          </p:val>
+                                        </p:tav>
+                                        <p:tav tm="100000">
+                                          <p:val>
+                                            <p:strVal val="#ppt_y"/>
+                                          </p:val>
+                                        </p:tav>
+                                      </p:tavLst>
+                                    </p:anim>
+                                  </p:childTnLst>
+                                </p:cTn>
+                              </p:par>
+                            </p:childTnLst>
+                          </p:cTn>
+                        </p:par>
+                      </p:childTnLst>
+                    </p:cTn>
+                  </p:par>
+                </p:childTnLst>
+              </p:cTn>
+              <p:prevCondLst>
+                <p:cond evt="onPrev" delay="0">
+                  <p:tgtEl>
+                    <p:sldTgt/>
+                  </p:tgtEl>
+                </p:cond>
+              </p:prevCondLst>
+              <p:nextCondLst>
+                <p:cond evt="onNext" delay="0">
+                  <p:tgtEl>
+                    <p:sldTgt/>
+                  </p:tgtEl>
+                </p:cond>
+              </p:nextCondLst>
+            </p:seq>
+          </p:childTnLst>
+        </p:cTn>
+      </p:par>
+    </p:tnLst>
+    <p:bldLst>
+      <p:bldP spid="3" grpId="0" animBg="1"/>
+    </p:bldLst>
+  </p:timing>
 </p:sld>
 </file>
 
@@ -7656,10 +8838,10 @@
       </p:sp>
       <p:pic>
         <p:nvPicPr>
-          <p:cNvPr id="6" name="Picture 5">
+          <p:cNvPr id="3" name="Picture 2">
             <a:extLst>
               <a:ext uri="{FF2B5EF4-FFF2-40B4-BE49-F238E27FC236}">
-                <a16:creationId xmlns:a16="http://schemas.microsoft.com/office/drawing/2014/main" id="{125E874B-FBE7-4686-AA8E-C727ADC1BCE4}"/>
+                <a16:creationId xmlns:a16="http://schemas.microsoft.com/office/drawing/2014/main" id="{3FD0505E-9DB0-F353-3484-D6B73501C188}"/>
               </a:ext>
             </a:extLst>
           </p:cNvPr>
@@ -7676,30 +8858,20 @@
         </p:blipFill>
         <p:spPr>
           <a:xfrm>
-            <a:off x="609601" y="1559943"/>
-            <a:ext cx="6285568" cy="3164458"/>
+            <a:off x="228601" y="1676400"/>
+            <a:ext cx="3343836" cy="1752600"/>
           </a:xfrm>
           <a:prstGeom prst="rect">
             <a:avLst/>
           </a:prstGeom>
-          <a:ln>
-            <a:noFill/>
-          </a:ln>
-          <a:effectLst>
-            <a:outerShdw blurRad="292100" dist="139700" dir="2700000" algn="tl" rotWithShape="0">
-              <a:srgbClr val="333333">
-                <a:alpha val="65000"/>
-              </a:srgbClr>
-            </a:outerShdw>
-          </a:effectLst>
         </p:spPr>
       </p:pic>
       <p:pic>
         <p:nvPicPr>
-          <p:cNvPr id="4" name="Picture 3">
+          <p:cNvPr id="5" name="Picture 4">
             <a:extLst>
               <a:ext uri="{FF2B5EF4-FFF2-40B4-BE49-F238E27FC236}">
-                <a16:creationId xmlns:a16="http://schemas.microsoft.com/office/drawing/2014/main" id="{49A9A611-68E7-450E-921B-6F9EA2A9D975}"/>
+                <a16:creationId xmlns:a16="http://schemas.microsoft.com/office/drawing/2014/main" id="{985B3E2B-0317-A661-4AA1-7675EBFC94F6}"/>
               </a:ext>
             </a:extLst>
           </p:cNvPr>
@@ -7716,22 +8888,12 @@
         </p:blipFill>
         <p:spPr>
           <a:xfrm>
-            <a:off x="6705600" y="2418072"/>
-            <a:ext cx="5243766" cy="4142712"/>
+            <a:off x="4800600" y="1720014"/>
+            <a:ext cx="6477000" cy="3906086"/>
           </a:xfrm>
           <a:prstGeom prst="rect">
             <a:avLst/>
           </a:prstGeom>
-          <a:ln>
-            <a:noFill/>
-          </a:ln>
-          <a:effectLst>
-            <a:outerShdw blurRad="292100" dist="139700" dir="2700000" algn="tl" rotWithShape="0">
-              <a:srgbClr val="333333">
-                <a:alpha val="65000"/>
-              </a:srgbClr>
-            </a:outerShdw>
-          </a:effectLst>
         </p:spPr>
       </p:pic>
     </p:spTree>
@@ -7744,6 +8906,18 @@
   <p:clrMapOvr>
     <a:masterClrMapping/>
   </p:clrMapOvr>
+  <mc:AlternateContent xmlns:mc="http://schemas.openxmlformats.org/markup-compatibility/2006">
+    <mc:Choice xmlns:p159="http://schemas.microsoft.com/office/powerpoint/2015/09/main" Requires="p159">
+      <p:transition xmlns:p14="http://schemas.microsoft.com/office/powerpoint/2010/main" spd="slow" p14:dur="2000">
+        <p159:morph option="byObject"/>
+      </p:transition>
+    </mc:Choice>
+    <mc:Fallback>
+      <p:transition spd="slow">
+        <p:fade/>
+      </p:transition>
+    </mc:Fallback>
+  </mc:AlternateContent>
 </p:sld>
 </file>
 
@@ -7764,43 +8938,12 @@
           <a:chExt cx="0" cy="0"/>
         </a:xfrm>
       </p:grpSpPr>
-      <p:sp>
-        <p:nvSpPr>
-          <p:cNvPr id="2" name="Title 1">
+      <p:pic>
+        <p:nvPicPr>
+          <p:cNvPr id="3" name="Picture 2">
             <a:extLst>
               <a:ext uri="{FF2B5EF4-FFF2-40B4-BE49-F238E27FC236}">
-                <a16:creationId xmlns:a16="http://schemas.microsoft.com/office/drawing/2014/main" id="{B3200CB6-BA6A-47E2-9B03-089A26EBD322}"/>
-              </a:ext>
-            </a:extLst>
-          </p:cNvPr>
-          <p:cNvSpPr>
-            <a:spLocks noGrp="1"/>
-          </p:cNvSpPr>
-          <p:nvPr>
-            <p:ph type="title"/>
-          </p:nvPr>
-        </p:nvSpPr>
-        <p:spPr/>
-        <p:txBody>
-          <a:bodyPr>
-            <a:normAutofit fontScale="90000"/>
-          </a:bodyPr>
-          <a:lstStyle/>
-          <a:p>
-            <a:r>
-              <a:rPr lang="en-GB" dirty="0"/>
-              <a:t>If you wanted more than one line of code associated with a case, just declare a code block:</a:t>
-            </a:r>
-            <a:endParaRPr lang="en-VI" dirty="0"/>
-          </a:p>
-        </p:txBody>
-      </p:sp>
-      <p:pic>
-        <p:nvPicPr>
-          <p:cNvPr id="5" name="Picture 4">
-            <a:extLst>
-              <a:ext uri="{FF2B5EF4-FFF2-40B4-BE49-F238E27FC236}">
-                <a16:creationId xmlns:a16="http://schemas.microsoft.com/office/drawing/2014/main" id="{824102DD-344B-4594-A85B-8B9658F6A0C2}"/>
+                <a16:creationId xmlns:a16="http://schemas.microsoft.com/office/drawing/2014/main" id="{20145478-B60A-2308-443F-3B3BF6DCCE59}"/>
               </a:ext>
             </a:extLst>
           </p:cNvPr>
@@ -7817,24 +8960,45 @@
         </p:blipFill>
         <p:spPr>
           <a:xfrm>
-            <a:off x="1676400" y="1640502"/>
-            <a:ext cx="8458200" cy="4920282"/>
+            <a:off x="457200" y="1676400"/>
+            <a:ext cx="9525000" cy="5038107"/>
           </a:xfrm>
           <a:prstGeom prst="rect">
             <a:avLst/>
           </a:prstGeom>
-          <a:ln>
-            <a:noFill/>
-          </a:ln>
-          <a:effectLst>
-            <a:outerShdw blurRad="292100" dist="139700" dir="2700000" algn="tl" rotWithShape="0">
-              <a:srgbClr val="333333">
-                <a:alpha val="65000"/>
-              </a:srgbClr>
-            </a:outerShdw>
-          </a:effectLst>
         </p:spPr>
       </p:pic>
+      <p:sp>
+        <p:nvSpPr>
+          <p:cNvPr id="2" name="Title 1">
+            <a:extLst>
+              <a:ext uri="{FF2B5EF4-FFF2-40B4-BE49-F238E27FC236}">
+                <a16:creationId xmlns:a16="http://schemas.microsoft.com/office/drawing/2014/main" id="{B3200CB6-BA6A-47E2-9B03-089A26EBD322}"/>
+              </a:ext>
+            </a:extLst>
+          </p:cNvPr>
+          <p:cNvSpPr>
+            <a:spLocks noGrp="1"/>
+          </p:cNvSpPr>
+          <p:nvPr>
+            <p:ph type="title"/>
+          </p:nvPr>
+        </p:nvSpPr>
+        <p:spPr/>
+        <p:txBody>
+          <a:bodyPr>
+            <a:normAutofit fontScale="90000"/>
+          </a:bodyPr>
+          <a:lstStyle/>
+          <a:p>
+            <a:r>
+              <a:rPr lang="en-GB" dirty="0"/>
+              <a:t>If you wanted more than one line of code associated with a case, just declare a code block:</a:t>
+            </a:r>
+            <a:endParaRPr lang="en-VI" dirty="0"/>
+          </a:p>
+        </p:txBody>
+      </p:sp>
       <p:sp>
         <p:nvSpPr>
           <p:cNvPr id="7" name="Arrow: Left 6">
@@ -7849,8 +9013,8 @@
         </p:nvSpPr>
         <p:spPr>
           <a:xfrm>
-            <a:off x="6934200" y="3383936"/>
-            <a:ext cx="1219200" cy="685800"/>
+            <a:off x="6553200" y="3352800"/>
+            <a:ext cx="1828800" cy="685800"/>
           </a:xfrm>
           <a:prstGeom prst="leftArrow">
             <a:avLst/>
@@ -7899,7 +9063,13 @@
   <p:cSld>
     <p:spTree>
       <p:nvGrpSpPr>
-        <p:cNvPr id="1" name=""/>
+        <p:cNvPr id="1" name="">
+          <a:extLst>
+            <a:ext uri="{FF2B5EF4-FFF2-40B4-BE49-F238E27FC236}">
+              <a16:creationId xmlns:a16="http://schemas.microsoft.com/office/drawing/2014/main" id="{D8017751-44D1-C698-BC10-C7C3F57F8D8D}"/>
+            </a:ext>
+          </a:extLst>
+        </p:cNvPr>
         <p:cNvGrpSpPr/>
         <p:nvPr/>
       </p:nvGrpSpPr>
@@ -7911,9 +9081,45 @@
           <a:chExt cx="0" cy="0"/>
         </a:xfrm>
       </p:grpSpPr>
-      <p:sp>
-        <p:nvSpPr>
-          <p:cNvPr id="2" name="Title 1"/>
+      <p:pic>
+        <p:nvPicPr>
+          <p:cNvPr id="3" name="Picture 2">
+            <a:extLst>
+              <a:ext uri="{FF2B5EF4-FFF2-40B4-BE49-F238E27FC236}">
+                <a16:creationId xmlns:a16="http://schemas.microsoft.com/office/drawing/2014/main" id="{A70B9E48-9537-D2FC-90C6-4705F871B4B6}"/>
+              </a:ext>
+            </a:extLst>
+          </p:cNvPr>
+          <p:cNvPicPr>
+            <a:picLocks noChangeAspect="1"/>
+          </p:cNvPicPr>
+          <p:nvPr/>
+        </p:nvPicPr>
+        <p:blipFill>
+          <a:blip r:embed="rId2"/>
+          <a:stretch>
+            <a:fillRect/>
+          </a:stretch>
+        </p:blipFill>
+        <p:spPr>
+          <a:xfrm>
+            <a:off x="457200" y="1676401"/>
+            <a:ext cx="2667000" cy="1410670"/>
+          </a:xfrm>
+          <a:prstGeom prst="rect">
+            <a:avLst/>
+          </a:prstGeom>
+        </p:spPr>
+      </p:pic>
+      <p:sp>
+        <p:nvSpPr>
+          <p:cNvPr id="2" name="Title 1">
+            <a:extLst>
+              <a:ext uri="{FF2B5EF4-FFF2-40B4-BE49-F238E27FC236}">
+                <a16:creationId xmlns:a16="http://schemas.microsoft.com/office/drawing/2014/main" id="{7010AE2F-37C9-54F6-9E66-B4ECED0A3144}"/>
+              </a:ext>
+            </a:extLst>
+          </p:cNvPr>
           <p:cNvSpPr>
             <a:spLocks noGrp="1"/>
           </p:cNvSpPr>
@@ -7923,107 +9129,192 @@
         </p:nvSpPr>
         <p:spPr/>
         <p:txBody>
-          <a:bodyPr/>
-          <a:lstStyle/>
-          <a:p>
-            <a:r>
-              <a:rPr lang="en-IE" dirty="0"/>
-              <a:t>Topics list</a:t>
-            </a:r>
-          </a:p>
-        </p:txBody>
-      </p:sp>
-      <p:sp>
-        <p:nvSpPr>
-          <p:cNvPr id="5" name="Content Placeholder 4"/>
-          <p:cNvSpPr>
-            <a:spLocks noGrp="1"/>
-          </p:cNvSpPr>
-          <p:nvPr>
-            <p:ph idx="1"/>
-          </p:nvPr>
-        </p:nvSpPr>
-        <p:spPr>
-          <a:xfrm>
-            <a:off x="609600" y="1905001"/>
-            <a:ext cx="9525000" cy="4068763"/>
-          </a:xfrm>
-        </p:spPr>
-        <p:txBody>
           <a:bodyPr>
-            <a:normAutofit/>
+            <a:normAutofit fontScale="90000"/>
           </a:bodyPr>
           <a:lstStyle/>
           <a:p>
             <a:r>
-              <a:rPr lang="en-IE" dirty="0"/>
-              <a:t>A simple menu using switch.</a:t>
-            </a:r>
-          </a:p>
-          <a:p>
-            <a:r>
-              <a:rPr lang="en-IE" dirty="0"/>
-              <a:t>ShopV3.0 – adding a menu.</a:t>
-            </a:r>
-          </a:p>
-        </p:txBody>
-      </p:sp>
-      <p:sp>
-        <p:nvSpPr>
-          <p:cNvPr id="4" name="Rectangle 3"/>
-          <p:cNvSpPr/>
+              <a:rPr lang="en-GB" dirty="0"/>
+              <a:t>If you wanted more than one line of code associated with a case, just declare a code block:</a:t>
+            </a:r>
+            <a:endParaRPr lang="en-VI" dirty="0"/>
+          </a:p>
+        </p:txBody>
+      </p:sp>
+      <p:pic>
+        <p:nvPicPr>
+          <p:cNvPr id="4" name="Picture 3">
+            <a:extLst>
+              <a:ext uri="{FF2B5EF4-FFF2-40B4-BE49-F238E27FC236}">
+                <a16:creationId xmlns:a16="http://schemas.microsoft.com/office/drawing/2014/main" id="{0428884A-5517-6653-5017-AD11197807EB}"/>
+              </a:ext>
+            </a:extLst>
+          </p:cNvPr>
+          <p:cNvPicPr>
+            <a:picLocks noChangeAspect="1"/>
+          </p:cNvPicPr>
           <p:nvPr/>
-        </p:nvSpPr>
-        <p:spPr>
-          <a:xfrm>
-            <a:off x="609600" y="2590800"/>
-            <a:ext cx="5486400" cy="457200"/>
+        </p:nvPicPr>
+        <p:blipFill>
+          <a:blip r:embed="rId3"/>
+          <a:stretch>
+            <a:fillRect/>
+          </a:stretch>
+        </p:blipFill>
+        <p:spPr>
+          <a:xfrm>
+            <a:off x="4495800" y="3087070"/>
+            <a:ext cx="8281434" cy="2627929"/>
           </a:xfrm>
           <a:prstGeom prst="rect">
             <a:avLst/>
           </a:prstGeom>
-          <a:noFill/>
-          <a:ln>
-            <a:solidFill>
-              <a:srgbClr val="FF0000"/>
-            </a:solidFill>
-          </a:ln>
-        </p:spPr>
-        <p:style>
-          <a:lnRef idx="2">
-            <a:schemeClr val="accent1">
-              <a:shade val="50000"/>
-            </a:schemeClr>
-          </a:lnRef>
-          <a:fillRef idx="1">
-            <a:schemeClr val="accent1"/>
-          </a:fillRef>
-          <a:effectRef idx="0">
-            <a:schemeClr val="accent1"/>
-          </a:effectRef>
-          <a:fontRef idx="minor">
-            <a:schemeClr val="lt1"/>
-          </a:fontRef>
-        </p:style>
-        <p:txBody>
-          <a:bodyPr rtlCol="0" anchor="ctr"/>
-          <a:lstStyle/>
-          <a:p>
-            <a:pPr algn="ctr"/>
-            <a:endParaRPr lang="en-IE"/>
-          </a:p>
-        </p:txBody>
-      </p:sp>
+        </p:spPr>
+      </p:pic>
     </p:spTree>
     <p:extLst>
       <p:ext uri="{BB962C8B-B14F-4D97-AF65-F5344CB8AC3E}">
-        <p14:creationId xmlns:p14="http://schemas.microsoft.com/office/powerpoint/2010/main" val="2688943309"/>
+        <p14:creationId xmlns:p14="http://schemas.microsoft.com/office/powerpoint/2010/main" val="563892673"/>
       </p:ext>
     </p:extLst>
   </p:cSld>
   <p:clrMapOvr>
     <a:masterClrMapping/>
   </p:clrMapOvr>
+  <mc:AlternateContent xmlns:mc="http://schemas.openxmlformats.org/markup-compatibility/2006">
+    <mc:Choice xmlns:p159="http://schemas.microsoft.com/office/powerpoint/2015/09/main" Requires="p159">
+      <p:transition xmlns:p14="http://schemas.microsoft.com/office/powerpoint/2010/main" spd="slow" p14:dur="2000">
+        <p159:morph option="byObject"/>
+      </p:transition>
+    </mc:Choice>
+    <mc:Fallback>
+      <p:transition spd="slow">
+        <p:fade/>
+      </p:transition>
+    </mc:Fallback>
+  </mc:AlternateContent>
+  <p:timing>
+    <p:tnLst>
+      <p:par>
+        <p:cTn id="1" dur="indefinite" restart="never" nodeType="tmRoot">
+          <p:childTnLst>
+            <p:seq concurrent="1" nextAc="seek">
+              <p:cTn id="2" dur="indefinite" nodeType="mainSeq">
+                <p:childTnLst>
+                  <p:par>
+                    <p:cTn id="3" fill="hold">
+                      <p:stCondLst>
+                        <p:cond delay="indefinite"/>
+                      </p:stCondLst>
+                      <p:childTnLst>
+                        <p:par>
+                          <p:cTn id="4" fill="hold">
+                            <p:stCondLst>
+                              <p:cond delay="0"/>
+                            </p:stCondLst>
+                            <p:childTnLst>
+                              <p:par>
+                                <p:cTn id="5" presetID="2" presetClass="entr" presetSubtype="4" fill="hold" nodeType="clickEffect">
+                                  <p:stCondLst>
+                                    <p:cond delay="0"/>
+                                  </p:stCondLst>
+                                  <p:childTnLst>
+                                    <p:set>
+                                      <p:cBhvr>
+                                        <p:cTn id="6" dur="1" fill="hold">
+                                          <p:stCondLst>
+                                            <p:cond delay="0"/>
+                                          </p:stCondLst>
+                                        </p:cTn>
+                                        <p:tgtEl>
+                                          <p:spTgt spid="4"/>
+                                        </p:tgtEl>
+                                        <p:attrNameLst>
+                                          <p:attrName>style.visibility</p:attrName>
+                                        </p:attrNameLst>
+                                      </p:cBhvr>
+                                      <p:to>
+                                        <p:strVal val="visible"/>
+                                      </p:to>
+                                    </p:set>
+                                    <p:anim calcmode="lin" valueType="num">
+                                      <p:cBhvr additive="base">
+                                        <p:cTn id="7" dur="500" fill="hold"/>
+                                        <p:tgtEl>
+                                          <p:spTgt spid="4"/>
+                                        </p:tgtEl>
+                                        <p:attrNameLst>
+                                          <p:attrName>ppt_x</p:attrName>
+                                        </p:attrNameLst>
+                                      </p:cBhvr>
+                                      <p:tavLst>
+                                        <p:tav tm="0">
+                                          <p:val>
+                                            <p:strVal val="#ppt_x"/>
+                                          </p:val>
+                                        </p:tav>
+                                        <p:tav tm="100000">
+                                          <p:val>
+                                            <p:strVal val="#ppt_x"/>
+                                          </p:val>
+                                        </p:tav>
+                                      </p:tavLst>
+                                    </p:anim>
+                                    <p:anim calcmode="lin" valueType="num">
+                                      <p:cBhvr additive="base">
+                                        <p:cTn id="8" dur="500" fill="hold"/>
+                                        <p:tgtEl>
+                                          <p:spTgt spid="4"/>
+                                        </p:tgtEl>
+                                        <p:attrNameLst>
+                                          <p:attrName>ppt_y</p:attrName>
+                                        </p:attrNameLst>
+                                      </p:cBhvr>
+                                      <p:tavLst>
+                                        <p:tav tm="0">
+                                          <p:val>
+                                            <p:strVal val="1+#ppt_h/2"/>
+                                          </p:val>
+                                        </p:tav>
+                                        <p:tav tm="100000">
+                                          <p:val>
+                                            <p:strVal val="#ppt_y"/>
+                                          </p:val>
+                                        </p:tav>
+                                      </p:tavLst>
+                                    </p:anim>
+                                  </p:childTnLst>
+                                </p:cTn>
+                              </p:par>
+                            </p:childTnLst>
+                          </p:cTn>
+                        </p:par>
+                      </p:childTnLst>
+                    </p:cTn>
+                  </p:par>
+                </p:childTnLst>
+              </p:cTn>
+              <p:prevCondLst>
+                <p:cond evt="onPrev" delay="0">
+                  <p:tgtEl>
+                    <p:sldTgt/>
+                  </p:tgtEl>
+                </p:cond>
+              </p:prevCondLst>
+              <p:nextCondLst>
+                <p:cond evt="onNext" delay="0">
+                  <p:tgtEl>
+                    <p:sldTgt/>
+                  </p:tgtEl>
+                </p:cond>
+              </p:nextCondLst>
+            </p:seq>
+          </p:childTnLst>
+        </p:cTn>
+      </p:par>
+    </p:tnLst>
+  </p:timing>
 </p:sld>
 </file>
 
@@ -8056,6 +9347,33 @@
         </p:nvSpPr>
         <p:spPr/>
         <p:txBody>
+          <a:bodyPr/>
+          <a:lstStyle/>
+          <a:p>
+            <a:r>
+              <a:rPr lang="en-IE" dirty="0"/>
+              <a:t>Topics list</a:t>
+            </a:r>
+          </a:p>
+        </p:txBody>
+      </p:sp>
+      <p:sp>
+        <p:nvSpPr>
+          <p:cNvPr id="5" name="Content Placeholder 4"/>
+          <p:cNvSpPr>
+            <a:spLocks noGrp="1"/>
+          </p:cNvSpPr>
+          <p:nvPr>
+            <p:ph idx="1"/>
+          </p:nvPr>
+        </p:nvSpPr>
+        <p:spPr>
+          <a:xfrm>
+            <a:off x="609600" y="1905001"/>
+            <a:ext cx="9525000" cy="4068763"/>
+          </a:xfrm>
+        </p:spPr>
+        <p:txBody>
           <a:bodyPr>
             <a:normAutofit/>
           </a:bodyPr>
@@ -8063,55 +9381,67 @@
           <a:p>
             <a:r>
               <a:rPr lang="en-IE" dirty="0"/>
-              <a:t>Adding a basic menu to Shop…</a:t>
-            </a:r>
-          </a:p>
-        </p:txBody>
-      </p:sp>
-      <p:pic>
-        <p:nvPicPr>
-          <p:cNvPr id="4" name="Picture 3">
-            <a:extLst>
-              <a:ext uri="{FF2B5EF4-FFF2-40B4-BE49-F238E27FC236}">
-                <a16:creationId xmlns:a16="http://schemas.microsoft.com/office/drawing/2014/main" id="{F22DD56C-B612-4F28-8D08-66E8BE641F83}"/>
-              </a:ext>
-            </a:extLst>
-          </p:cNvPr>
-          <p:cNvPicPr>
-            <a:picLocks noChangeAspect="1"/>
-          </p:cNvPicPr>
+              <a:t>A simple menu using switch.</a:t>
+            </a:r>
+          </a:p>
+          <a:p>
+            <a:r>
+              <a:rPr lang="en-IE" dirty="0"/>
+              <a:t>ShopV3.0 – adding a menu.</a:t>
+            </a:r>
+          </a:p>
+        </p:txBody>
+      </p:sp>
+      <p:sp>
+        <p:nvSpPr>
+          <p:cNvPr id="4" name="Rectangle 3"/>
+          <p:cNvSpPr/>
           <p:nvPr/>
-        </p:nvPicPr>
-        <p:blipFill>
-          <a:blip r:embed="rId2"/>
-          <a:stretch>
-            <a:fillRect/>
-          </a:stretch>
-        </p:blipFill>
-        <p:spPr>
-          <a:xfrm>
-            <a:off x="2438400" y="1981200"/>
-            <a:ext cx="7517600" cy="3710165"/>
+        </p:nvSpPr>
+        <p:spPr>
+          <a:xfrm>
+            <a:off x="609600" y="2590800"/>
+            <a:ext cx="5486400" cy="457200"/>
           </a:xfrm>
           <a:prstGeom prst="rect">
             <a:avLst/>
           </a:prstGeom>
+          <a:noFill/>
           <a:ln>
-            <a:noFill/>
+            <a:solidFill>
+              <a:srgbClr val="FF0000"/>
+            </a:solidFill>
           </a:ln>
-          <a:effectLst>
-            <a:outerShdw blurRad="292100" dist="139700" dir="2700000" algn="tl" rotWithShape="0">
-              <a:srgbClr val="333333">
-                <a:alpha val="65000"/>
-              </a:srgbClr>
-            </a:outerShdw>
-          </a:effectLst>
-        </p:spPr>
-      </p:pic>
+        </p:spPr>
+        <p:style>
+          <a:lnRef idx="2">
+            <a:schemeClr val="accent1">
+              <a:shade val="50000"/>
+            </a:schemeClr>
+          </a:lnRef>
+          <a:fillRef idx="1">
+            <a:schemeClr val="accent1"/>
+          </a:fillRef>
+          <a:effectRef idx="0">
+            <a:schemeClr val="accent1"/>
+          </a:effectRef>
+          <a:fontRef idx="minor">
+            <a:schemeClr val="lt1"/>
+          </a:fontRef>
+        </p:style>
+        <p:txBody>
+          <a:bodyPr rtlCol="0" anchor="ctr"/>
+          <a:lstStyle/>
+          <a:p>
+            <a:pPr algn="ctr"/>
+            <a:endParaRPr lang="en-IE"/>
+          </a:p>
+        </p:txBody>
+      </p:sp>
     </p:spTree>
     <p:extLst>
       <p:ext uri="{BB962C8B-B14F-4D97-AF65-F5344CB8AC3E}">
-        <p14:creationId xmlns:p14="http://schemas.microsoft.com/office/powerpoint/2010/main" val="2696557515"/>
+        <p14:creationId xmlns:p14="http://schemas.microsoft.com/office/powerpoint/2010/main" val="2688943309"/>
       </p:ext>
     </p:extLst>
   </p:cSld>
@@ -8140,13 +9470,7 @@
       </p:grpSpPr>
       <p:sp>
         <p:nvSpPr>
-          <p:cNvPr id="2" name="Title 1">
-            <a:extLst>
-              <a:ext uri="{FF2B5EF4-FFF2-40B4-BE49-F238E27FC236}">
-                <a16:creationId xmlns:a16="http://schemas.microsoft.com/office/drawing/2014/main" id="{B224850E-FD0D-4AE2-A26F-3F544CDC8E33}"/>
-              </a:ext>
-            </a:extLst>
-          </p:cNvPr>
+          <p:cNvPr id="2" name="Title 1"/>
           <p:cNvSpPr>
             <a:spLocks noGrp="1"/>
           </p:cNvSpPr>
@@ -8156,22 +9480,24 @@
         </p:nvSpPr>
         <p:spPr/>
         <p:txBody>
-          <a:bodyPr/>
+          <a:bodyPr>
+            <a:normAutofit/>
+          </a:bodyPr>
           <a:lstStyle/>
           <a:p>
             <a:r>
               <a:rPr lang="en-IE" dirty="0"/>
-              <a:t>Menu to be displayed…</a:t>
+              <a:t>Adding a basic menu to Shop…</a:t>
             </a:r>
           </a:p>
         </p:txBody>
       </p:sp>
       <p:pic>
         <p:nvPicPr>
-          <p:cNvPr id="7" name="Picture 6">
+          <p:cNvPr id="3" name="Picture 2">
             <a:extLst>
               <a:ext uri="{FF2B5EF4-FFF2-40B4-BE49-F238E27FC236}">
-                <a16:creationId xmlns:a16="http://schemas.microsoft.com/office/drawing/2014/main" id="{1C49070A-6EBA-4189-B1BC-2E32663EC7D5}"/>
+                <a16:creationId xmlns:a16="http://schemas.microsoft.com/office/drawing/2014/main" id="{9B6CA71C-CE8B-1078-AB51-B6360C48CEDE}"/>
               </a:ext>
             </a:extLst>
           </p:cNvPr>
@@ -8188,117 +9514,18 @@
         </p:blipFill>
         <p:spPr>
           <a:xfrm>
-            <a:off x="854936" y="1752600"/>
-            <a:ext cx="7603264" cy="4334108"/>
+            <a:off x="795728" y="1905000"/>
+            <a:ext cx="10701728" cy="3962400"/>
           </a:xfrm>
           <a:prstGeom prst="rect">
             <a:avLst/>
           </a:prstGeom>
-          <a:ln>
-            <a:noFill/>
-          </a:ln>
-          <a:effectLst>
-            <a:outerShdw blurRad="292100" dist="139700" dir="2700000" algn="tl" rotWithShape="0">
-              <a:srgbClr val="333333">
-                <a:alpha val="65000"/>
-              </a:srgbClr>
-            </a:outerShdw>
-          </a:effectLst>
-        </p:spPr>
-      </p:pic>
-      <p:sp>
-        <p:nvSpPr>
-          <p:cNvPr id="3" name="Rectangle: Rounded Corners 2">
-            <a:extLst>
-              <a:ext uri="{FF2B5EF4-FFF2-40B4-BE49-F238E27FC236}">
-                <a16:creationId xmlns:a16="http://schemas.microsoft.com/office/drawing/2014/main" id="{7D43BBB1-AACF-4EC4-AE5D-93125460DFAD}"/>
-              </a:ext>
-            </a:extLst>
-          </p:cNvPr>
-          <p:cNvSpPr/>
-          <p:nvPr/>
-        </p:nvSpPr>
-        <p:spPr>
-          <a:xfrm>
-            <a:off x="6858000" y="1600200"/>
-            <a:ext cx="1905000" cy="685800"/>
-          </a:xfrm>
-          <a:prstGeom prst="roundRect">
-            <a:avLst/>
-          </a:prstGeom>
-        </p:spPr>
-        <p:style>
-          <a:lnRef idx="2">
-            <a:schemeClr val="accent1">
-              <a:shade val="50000"/>
-            </a:schemeClr>
-          </a:lnRef>
-          <a:fillRef idx="1">
-            <a:schemeClr val="accent1"/>
-          </a:fillRef>
-          <a:effectRef idx="0">
-            <a:schemeClr val="accent1"/>
-          </a:effectRef>
-          <a:fontRef idx="minor">
-            <a:schemeClr val="lt1"/>
-          </a:fontRef>
-        </p:style>
-        <p:txBody>
-          <a:bodyPr rtlCol="0" anchor="ctr"/>
-          <a:lstStyle/>
-          <a:p>
-            <a:pPr algn="ctr"/>
-            <a:r>
-              <a:rPr lang="en-IE" sz="2400" dirty="0"/>
-              <a:t>Driver Class</a:t>
-            </a:r>
-          </a:p>
-        </p:txBody>
-      </p:sp>
-      <p:pic>
-        <p:nvPicPr>
-          <p:cNvPr id="8" name="Picture 7">
-            <a:extLst>
-              <a:ext uri="{FF2B5EF4-FFF2-40B4-BE49-F238E27FC236}">
-                <a16:creationId xmlns:a16="http://schemas.microsoft.com/office/drawing/2014/main" id="{4DEAFAAA-213F-46B3-9DFA-D2718F5B427C}"/>
-              </a:ext>
-            </a:extLst>
-          </p:cNvPr>
-          <p:cNvPicPr>
-            <a:picLocks noChangeAspect="1"/>
-          </p:cNvPicPr>
-          <p:nvPr/>
-        </p:nvPicPr>
-        <p:blipFill>
-          <a:blip r:embed="rId3"/>
-          <a:stretch>
-            <a:fillRect/>
-          </a:stretch>
-        </p:blipFill>
-        <p:spPr>
-          <a:xfrm>
-            <a:off x="7467600" y="2438400"/>
-            <a:ext cx="3869464" cy="1909699"/>
-          </a:xfrm>
-          <a:prstGeom prst="rect">
-            <a:avLst/>
-          </a:prstGeom>
-          <a:ln>
-            <a:noFill/>
-          </a:ln>
-          <a:effectLst>
-            <a:outerShdw blurRad="292100" dist="139700" dir="2700000" algn="tl" rotWithShape="0">
-              <a:srgbClr val="333333">
-                <a:alpha val="65000"/>
-              </a:srgbClr>
-            </a:outerShdw>
-          </a:effectLst>
         </p:spPr>
       </p:pic>
     </p:spTree>
     <p:extLst>
       <p:ext uri="{BB962C8B-B14F-4D97-AF65-F5344CB8AC3E}">
-        <p14:creationId xmlns:p14="http://schemas.microsoft.com/office/powerpoint/2010/main" val="956956018"/>
+        <p14:creationId xmlns:p14="http://schemas.microsoft.com/office/powerpoint/2010/main" val="2696557515"/>
       </p:ext>
     </p:extLst>
   </p:cSld>
